--- a/Презентация.pptx
+++ b/Презентация.pptx
@@ -4,6 +4,9 @@
   <p:sldMasterIdLst>
     <p:sldMasterId id="2147483648" r:id="rId1"/>
   </p:sldMasterIdLst>
+  <p:notesMasterIdLst>
+    <p:notesMasterId r:id="rId13"/>
+  </p:notesMasterIdLst>
   <p:sldIdLst>
     <p:sldId id="256" r:id="rId2"/>
     <p:sldId id="257" r:id="rId3"/>
@@ -17,9 +20,6 @@
     <p:sldId id="265" r:id="rId11"/>
     <p:sldId id="266" r:id="rId12"/>
   </p:sldIdLst>
-  <p:notesMasterIdLst>
-    <p:notesMasterId r:id="rId13"/>
-  </p:notesMasterIdLst>
   <p:sldSz cx="12192000" cy="6858000"/>
   <p:notesSz cx="6858000" cy="12192000"/>
   <p:defaultTextStyle>
@@ -114,6 +114,11 @@
       </a:defRPr>
     </a:lvl9pPr>
   </p:defaultTextStyle>
+  <p:extLst>
+    <p:ext uri="{EFAFB233-063F-42B5-8137-9DF3F51BA10A}">
+      <p15:sldGuideLst xmlns:p15="http://schemas.microsoft.com/office/powerpoint/2012/main"/>
+    </p:ext>
+  </p:extLst>
 </p:presentation>
 </file>
 
@@ -139,234 +144,10 @@
           <a:chExt cx="0" cy="0"/>
         </a:xfrm>
       </p:grpSpPr>
-      <p:sp>
-        <p:nvSpPr>
-          <p:cNvPr id="2" name="Header Placeholder 1"/>
-          <p:cNvSpPr>
-            <a:spLocks noGrp="1"/>
-          </p:cNvSpPr>
-          <p:nvPr>
-            <p:ph type="hdr" sz="quarter"/>
-          </p:nvPr>
-        </p:nvSpPr>
-        <p:spPr>
-          <a:xfrm>
-            <a:off x="0" y="0"/>
-            <a:ext cx="2971800" cy="458788"/>
-          </a:xfrm>
-          <a:prstGeom prst="rect">
-            <a:avLst/>
-          </a:prstGeom>
-        </p:spPr>
-        <p:txBody>
-          <a:bodyPr vert="horz" lIns="91440" tIns="45720" rIns="91440" bIns="45720" rtlCol="0"/>
-          <a:lstStyle>
-            <a:lvl1pPr algn="l">
-              <a:defRPr sz="1200"/>
-            </a:lvl1pPr>
-          </a:lstStyle>
-          <a:p>
-            <a:endParaRPr lang="en-US"/>
-          </a:p>
-        </p:txBody>
-      </p:sp>
-      <p:sp>
-        <p:nvSpPr>
-          <p:cNvPr id="3" name="Date Placeholder 2"/>
-          <p:cNvSpPr>
-            <a:spLocks noGrp="1"/>
-          </p:cNvSpPr>
-          <p:nvPr>
-            <p:ph type="dt" idx="1"/>
-          </p:nvPr>
-        </p:nvSpPr>
-        <p:spPr>
-          <a:xfrm>
-            <a:off x="3884613" y="0"/>
-            <a:ext cx="2971800" cy="458788"/>
-          </a:xfrm>
-          <a:prstGeom prst="rect">
-            <a:avLst/>
-          </a:prstGeom>
-        </p:spPr>
-        <p:txBody>
-          <a:bodyPr vert="horz" lIns="91440" tIns="45720" rIns="91440" bIns="45720" rtlCol="0"/>
-          <a:lstStyle>
-            <a:lvl1pPr algn="r">
-              <a:defRPr sz="1200"/>
-            </a:lvl1pPr>
-          </a:lstStyle>
-          <a:p>
-            <a:fld id="{5282F153-3F37-0F45-9E97-73ACFA13230C}" type="datetimeFigureOut">
-              <a:rPr lang="en-US"/>
-              <a:t>7/23/19</a:t>
-            </a:fld>
-            <a:endParaRPr lang="en-US"/>
-          </a:p>
-        </p:txBody>
-      </p:sp>
-      <p:sp>
-        <p:nvSpPr>
-          <p:cNvPr id="4" name="Slide Image Placeholder 3"/>
-          <p:cNvSpPr>
-            <a:spLocks noGrp="1" noRot="1" noChangeAspect="1"/>
-          </p:cNvSpPr>
-          <p:nvPr>
-            <p:ph type="sldImg" idx="2"/>
-          </p:nvPr>
-        </p:nvSpPr>
-        <p:spPr>
-          <a:xfrm>
-            <a:off x="685800" y="1143000"/>
-            <a:ext cx="5486400" cy="3086100"/>
-          </a:xfrm>
-          <a:prstGeom prst="rect">
-            <a:avLst/>
-          </a:prstGeom>
-          <a:noFill/>
-          <a:ln w="12700">
-            <a:solidFill>
-              <a:prstClr val="black"/>
-            </a:solidFill>
-          </a:ln>
-        </p:spPr>
-        <p:txBody>
-          <a:bodyPr vert="horz" lIns="91440" tIns="45720" rIns="91440" bIns="45720" rtlCol="0" anchor="ctr"/>
-          <a:lstStyle/>
-          <a:p>
-            <a:endParaRPr lang="en-US"/>
-          </a:p>
-        </p:txBody>
-      </p:sp>
-      <p:sp>
-        <p:nvSpPr>
-          <p:cNvPr id="5" name="Notes Placeholder 4"/>
-          <p:cNvSpPr>
-            <a:spLocks noGrp="1"/>
-          </p:cNvSpPr>
-          <p:nvPr>
-            <p:ph type="body" sz="quarter" idx="3"/>
-          </p:nvPr>
-        </p:nvSpPr>
-        <p:spPr>
-          <a:xfrm>
-            <a:off x="685800" y="4400550"/>
-            <a:ext cx="5486400" cy="3600450"/>
-          </a:xfrm>
-          <a:prstGeom prst="rect">
-            <a:avLst/>
-          </a:prstGeom>
-        </p:spPr>
-        <p:txBody>
-          <a:bodyPr vert="horz" lIns="91440" tIns="45720" rIns="91440" bIns="45720" rtlCol="0"/>
-          <a:lstStyle/>
-          <a:p>
-            <a:pPr lvl="0"/>
-            <a:r>
-              <a:rPr lang="en-US"/>
-              <a:t>Click to edit Master text styles</a:t>
-            </a:r>
-          </a:p>
-          <a:p>
-            <a:pPr lvl="1"/>
-            <a:r>
-              <a:rPr lang="en-US"/>
-              <a:t>Second level</a:t>
-            </a:r>
-          </a:p>
-          <a:p>
-            <a:pPr lvl="2"/>
-            <a:r>
-              <a:rPr lang="en-US"/>
-              <a:t>Third level</a:t>
-            </a:r>
-          </a:p>
-          <a:p>
-            <a:pPr lvl="3"/>
-            <a:r>
-              <a:rPr lang="en-US"/>
-              <a:t>Fourth level</a:t>
-            </a:r>
-          </a:p>
-          <a:p>
-            <a:pPr lvl="4"/>
-            <a:r>
-              <a:rPr lang="en-US"/>
-              <a:t>Fifth level</a:t>
-            </a:r>
-          </a:p>
-        </p:txBody>
-      </p:sp>
-      <p:sp>
-        <p:nvSpPr>
-          <p:cNvPr id="6" name="Footer Placeholder 5"/>
-          <p:cNvSpPr>
-            <a:spLocks noGrp="1"/>
-          </p:cNvSpPr>
-          <p:nvPr>
-            <p:ph type="ftr" sz="quarter" idx="4"/>
-          </p:nvPr>
-        </p:nvSpPr>
-        <p:spPr>
-          <a:xfrm>
-            <a:off x="0" y="8685213"/>
-            <a:ext cx="2971800" cy="458787"/>
-          </a:xfrm>
-          <a:prstGeom prst="rect">
-            <a:avLst/>
-          </a:prstGeom>
-        </p:spPr>
-        <p:txBody>
-          <a:bodyPr vert="horz" lIns="91440" tIns="45720" rIns="91440" bIns="45720" rtlCol="0" anchor="b"/>
-          <a:lstStyle>
-            <a:lvl1pPr algn="l">
-              <a:defRPr sz="1200"/>
-            </a:lvl1pPr>
-          </a:lstStyle>
-          <a:p>
-            <a:endParaRPr lang="en-US"/>
-          </a:p>
-        </p:txBody>
-      </p:sp>
-      <p:sp>
-        <p:nvSpPr>
-          <p:cNvPr id="7" name="Slide Number Placeholder 6"/>
-          <p:cNvSpPr>
-            <a:spLocks noGrp="1"/>
-          </p:cNvSpPr>
-          <p:nvPr>
-            <p:ph type="sldNum" sz="quarter" idx="5"/>
-          </p:nvPr>
-        </p:nvSpPr>
-        <p:spPr>
-          <a:xfrm>
-            <a:off x="3884613" y="8685213"/>
-            <a:ext cx="2971800" cy="458787"/>
-          </a:xfrm>
-          <a:prstGeom prst="rect">
-            <a:avLst/>
-          </a:prstGeom>
-        </p:spPr>
-        <p:txBody>
-          <a:bodyPr vert="horz" lIns="91440" tIns="45720" rIns="91440" bIns="45720" rtlCol="0" anchor="b"/>
-          <a:lstStyle>
-            <a:lvl1pPr algn="r">
-              <a:defRPr sz="1200"/>
-            </a:lvl1pPr>
-          </a:lstStyle>
-          <a:p>
-            <a:fld id="{CE5E9CC1-C706-0F49-92D6-E571CC5EEA8F}" type="slidenum">
-              <a:rPr lang="en-US"/>
-              <a:t>‹#›</a:t>
-            </a:fld>
-            <a:endParaRPr lang="en-US"/>
-          </a:p>
-        </p:txBody>
-      </p:sp>
     </p:spTree>
     <p:extLst>
       <p:ext uri="{BB962C8B-B14F-4D97-AF65-F5344CB8AC3E}">
-        <p14:creationId xmlns:p14="http://schemas.microsoft.com/office/powerpoint/2010/main" val="1024086991"/>
+        <p14:creationId xmlns:p14="http://schemas.microsoft.com/office/powerpoint/2010/main" val="663246787"/>
       </p:ext>
     </p:extLst>
   </p:cSld>
@@ -510,10 +291,6 @@
           <a:bodyPr/>
           <a:lstStyle/>
           <a:p>
-            <a:r>
-              <a:rPr lang="en-US" dirty="0"/>
-              <a:t/>
-            </a:r>
             <a:endParaRPr lang="en-US" dirty="0"/>
           </a:p>
         </p:txBody>
@@ -598,10 +375,6 @@
           <a:bodyPr/>
           <a:lstStyle/>
           <a:p>
-            <a:r>
-              <a:rPr lang="en-US" dirty="0"/>
-              <a:t/>
-            </a:r>
             <a:endParaRPr lang="en-US" dirty="0"/>
           </a:p>
         </p:txBody>
@@ -686,10 +459,6 @@
           <a:bodyPr/>
           <a:lstStyle/>
           <a:p>
-            <a:r>
-              <a:rPr lang="en-US" dirty="0"/>
-              <a:t/>
-            </a:r>
             <a:endParaRPr lang="en-US" dirty="0"/>
           </a:p>
         </p:txBody>
@@ -774,10 +543,6 @@
           <a:bodyPr/>
           <a:lstStyle/>
           <a:p>
-            <a:r>
-              <a:rPr lang="en-US" dirty="0"/>
-              <a:t/>
-            </a:r>
             <a:endParaRPr lang="en-US" dirty="0"/>
           </a:p>
         </p:txBody>
@@ -862,10 +627,6 @@
           <a:bodyPr/>
           <a:lstStyle/>
           <a:p>
-            <a:r>
-              <a:rPr lang="en-US" dirty="0"/>
-              <a:t/>
-            </a:r>
             <a:endParaRPr lang="en-US" dirty="0"/>
           </a:p>
         </p:txBody>
@@ -950,10 +711,6 @@
           <a:bodyPr/>
           <a:lstStyle/>
           <a:p>
-            <a:r>
-              <a:rPr lang="en-US" dirty="0"/>
-              <a:t/>
-            </a:r>
             <a:endParaRPr lang="en-US" dirty="0"/>
           </a:p>
         </p:txBody>
@@ -1038,10 +795,6 @@
           <a:bodyPr/>
           <a:lstStyle/>
           <a:p>
-            <a:r>
-              <a:rPr lang="en-US" dirty="0"/>
-              <a:t/>
-            </a:r>
             <a:endParaRPr lang="en-US" dirty="0"/>
           </a:p>
         </p:txBody>
@@ -1126,10 +879,6 @@
           <a:bodyPr/>
           <a:lstStyle/>
           <a:p>
-            <a:r>
-              <a:rPr lang="en-US" dirty="0"/>
-              <a:t/>
-            </a:r>
             <a:endParaRPr lang="en-US" dirty="0"/>
           </a:p>
         </p:txBody>
@@ -1214,10 +963,6 @@
           <a:bodyPr/>
           <a:lstStyle/>
           <a:p>
-            <a:r>
-              <a:rPr lang="en-US" dirty="0"/>
-              <a:t/>
-            </a:r>
             <a:endParaRPr lang="en-US" dirty="0"/>
           </a:p>
         </p:txBody>
@@ -1302,10 +1047,6 @@
           <a:bodyPr/>
           <a:lstStyle/>
           <a:p>
-            <a:r>
-              <a:rPr lang="en-US" dirty="0"/>
-              <a:t/>
-            </a:r>
             <a:endParaRPr lang="en-US" dirty="0"/>
           </a:p>
         </p:txBody>
@@ -1390,10 +1131,6 @@
           <a:bodyPr/>
           <a:lstStyle/>
           <a:p>
-            <a:r>
-              <a:rPr lang="en-US" dirty="0"/>
-              <a:t/>
-            </a:r>
             <a:endParaRPr lang="en-US" dirty="0"/>
           </a:p>
         </p:txBody>
@@ -1467,6 +1204,11 @@
 <file path=ppt/slideMasters/slideMaster1.xml><?xml version="1.0" encoding="utf-8"?>
 <p:sldMaster xmlns:a="http://schemas.openxmlformats.org/drawingml/2006/main" xmlns:r="http://schemas.openxmlformats.org/officeDocument/2006/relationships" xmlns:p="http://schemas.openxmlformats.org/presentationml/2006/main">
   <p:cSld>
+    <p:bg>
+      <p:bgRef idx="1001">
+        <a:schemeClr val="bg1"/>
+      </p:bgRef>
+    </p:bg>
     <p:spTree>
       <p:nvGrpSpPr>
         <p:cNvPr id="1" name=""/>
@@ -1760,14 +1502,14 @@
       </p:grpSpPr>
       <p:pic>
         <p:nvPicPr>
-          <p:cNvPr id="2" name="Image 0" descr="preencoded.png">    </p:cNvPr>
+          <p:cNvPr id="2" name="Image 0" descr="preencoded.png"/>
           <p:cNvPicPr>
             <a:picLocks noChangeAspect="1"/>
           </p:cNvPicPr>
           <p:nvPr/>
         </p:nvPicPr>
         <p:blipFill>
-          <a:blip r:embed="rId1"/>
+          <a:blip r:embed="rId3"/>
           <a:stretch>
             <a:fillRect/>
           </a:stretch>
@@ -1803,7 +1545,7 @@
           <a:bodyPr wrap="square" rtlCol="0" anchor="ctr"/>
           <a:lstStyle/>
           <a:p>
-            <a:pPr algn="l" indent="0" marL="0">
+            <a:pPr marL="0" indent="0" algn="l">
               <a:buNone/>
             </a:pPr>
             <a:endParaRPr lang="en-US" dirty="0"/>
@@ -1831,15 +1573,11 @@
           <a:bodyPr wrap="square" rtlCol="0" anchor="ctr"/>
           <a:lstStyle/>
           <a:p>
-            <a:pPr algn="l" indent="0" marL="0">
+            <a:pPr marL="0" indent="0" algn="l">
               <a:buNone/>
             </a:pPr>
             <a:r>
-              <a:rPr lang="en-US" sz="2200" b="1" dirty="0">
-                <a:solidFill>
-                  <a:srgbClr val="E8E6E3"/>
-                </a:solidFill>
-              </a:rPr>
+              <a:rPr lang="en-US" sz="2200" b="1" dirty="0"/>
               <a:t>Общие сведения проекта</a:t>
             </a:r>
             <a:endParaRPr lang="en-US" sz="2200" dirty="0"/>
@@ -1867,38 +1605,28 @@
           <a:bodyPr wrap="square" rtlCol="0" anchor="ctr"/>
           <a:lstStyle/>
           <a:p>
-            <a:pPr algn="l" indent="0" marL="0">
+            <a:pPr marL="0" indent="0" algn="l">
               <a:lnSpc>
                 <a:spcPts val="2000"/>
               </a:lnSpc>
               <a:buNone/>
             </a:pPr>
             <a:r>
-              <a:rPr lang="en-US" sz="1400" dirty="0">
-                <a:solidFill>
-                  <a:srgbClr val="E8E6E3"/>
-                </a:solidFill>
-              </a:rPr>
+              <a:rPr lang="en-US" sz="1400" dirty="0"/>
               <a:t>Название проекта: Крутой экзаменатор.</a:t>
             </a:r>
-            <a:endParaRPr lang="en-US" sz="1400" dirty="0"/>
-          </a:p>
-          <a:p>
-            <a:pPr algn="l" indent="0" marL="0">
+          </a:p>
+          <a:p>
+            <a:pPr marL="0" indent="0" algn="l">
               <a:lnSpc>
                 <a:spcPts val="2000"/>
               </a:lnSpc>
               <a:buNone/>
             </a:pPr>
             <a:r>
-              <a:rPr lang="en-US" sz="1400" dirty="0">
-                <a:solidFill>
-                  <a:srgbClr val="E8E6E3"/>
-                </a:solidFill>
-              </a:rPr>
+              <a:rPr lang="en-US" sz="1400" dirty="0"/>
               <a:t>Цель: Создание платформы для управления учебными билетами и автоматизированного тестирования знаний через веб-интерфейс и голосового помощника Алису.</a:t>
             </a:r>
-            <a:endParaRPr lang="en-US" sz="1400" dirty="0"/>
           </a:p>
         </p:txBody>
       </p:sp>
@@ -1907,6 +1635,13 @@
   <p:clrMapOvr>
     <a:masterClrMapping/>
   </p:clrMapOvr>
+  <p:timing>
+    <p:tnLst>
+      <p:par>
+        <p:cTn id="1" dur="indefinite" restart="never" nodeType="tmRoot"/>
+      </p:par>
+    </p:tnLst>
+  </p:timing>
 </p:sld>
 </file>
 
@@ -1929,14 +1664,14 @@
       </p:grpSpPr>
       <p:pic>
         <p:nvPicPr>
-          <p:cNvPr id="2" name="Image 0" descr="preencoded.png">    </p:cNvPr>
+          <p:cNvPr id="2" name="Image 0" descr="preencoded.png"/>
           <p:cNvPicPr>
             <a:picLocks noChangeAspect="1"/>
           </p:cNvPicPr>
           <p:nvPr/>
         </p:nvPicPr>
         <p:blipFill>
-          <a:blip r:embed="rId1"/>
+          <a:blip r:embed="rId3"/>
           <a:stretch>
             <a:fillRect/>
           </a:stretch>
@@ -1972,15 +1707,11 @@
           <a:bodyPr wrap="square" rtlCol="0" anchor="ctr"/>
           <a:lstStyle/>
           <a:p>
-            <a:pPr algn="l" indent="0" marL="0">
+            <a:pPr marL="0" indent="0" algn="l">
               <a:buNone/>
             </a:pPr>
             <a:r>
-              <a:rPr lang="en-US" sz="2200" b="1" dirty="0">
-                <a:solidFill>
-                  <a:srgbClr val="E8E6E3"/>
-                </a:solidFill>
-              </a:rPr>
+              <a:rPr lang="en-US" sz="2200" b="1" dirty="0"/>
               <a:t>Особенности реализации</a:t>
             </a:r>
             <a:endParaRPr lang="en-US" sz="2200" dirty="0"/>
@@ -2008,21 +1739,16 @@
           <a:bodyPr wrap="square" rtlCol="0" anchor="ctr"/>
           <a:lstStyle/>
           <a:p>
-            <a:pPr algn="l" indent="0" marL="0">
+            <a:pPr marL="0" indent="0" algn="l">
               <a:lnSpc>
                 <a:spcPts val="2000"/>
               </a:lnSpc>
               <a:buNone/>
             </a:pPr>
             <a:r>
-              <a:rPr lang="en-US" sz="1400" dirty="0">
-                <a:solidFill>
-                  <a:srgbClr val="E8E6E3"/>
-                </a:solidFill>
-              </a:rPr>
+              <a:rPr lang="en-US" sz="1400" dirty="0"/>
               <a:t>Использование difflib для обработки естественного ввода пользователя. Управление контекстом диалога через session_state в API Алисы.</a:t>
             </a:r>
-            <a:endParaRPr lang="en-US" sz="1400" dirty="0"/>
           </a:p>
         </p:txBody>
       </p:sp>
@@ -2047,21 +1773,16 @@
           <a:bodyPr wrap="square" rtlCol="0" anchor="ctr"/>
           <a:lstStyle/>
           <a:p>
-            <a:pPr algn="l" indent="0" marL="0">
+            <a:pPr marL="0" indent="0" algn="l">
               <a:lnSpc>
                 <a:spcPts val="2000"/>
               </a:lnSpc>
               <a:buNone/>
             </a:pPr>
             <a:r>
-              <a:rPr lang="en-US" sz="1400" dirty="0">
-                <a:solidFill>
-                  <a:srgbClr val="E8E6E3"/>
-                </a:solidFill>
-              </a:rPr>
+              <a:rPr lang="en-US" sz="1400" dirty="0"/>
               <a:t>Применение декораторов Flask-Login для защиты маршрутов. Эффективное использование session_state позволяет сохранять состояние диалога между запросами пользователя.</a:t>
             </a:r>
-            <a:endParaRPr lang="en-US" sz="1400" dirty="0"/>
           </a:p>
         </p:txBody>
       </p:sp>
@@ -2086,29 +1807,103 @@
           <a:bodyPr wrap="square" rtlCol="0" anchor="ctr"/>
           <a:lstStyle/>
           <a:p>
-            <a:pPr algn="l" indent="0" marL="0">
+            <a:pPr marL="0" indent="0" algn="l">
               <a:lnSpc>
                 <a:spcPts val="2000"/>
               </a:lnSpc>
               <a:buNone/>
             </a:pPr>
             <a:r>
-              <a:rPr lang="en-US" sz="1400" dirty="0">
-                <a:solidFill>
-                  <a:srgbClr val="E8E6E3"/>
-                </a:solidFill>
-              </a:rPr>
+              <a:rPr lang="en-US" sz="1400" dirty="0"/>
               <a:t>Это обеспечивает непрерывность и последовательность взаимодействия с системой.</a:t>
             </a:r>
-            <a:endParaRPr lang="en-US" sz="1400" dirty="0"/>
-          </a:p>
-        </p:txBody>
-      </p:sp>
+          </a:p>
+        </p:txBody>
+      </p:sp>
+      <p:pic>
+        <p:nvPicPr>
+          <p:cNvPr id="7" name="Рисунок 6"/>
+          <p:cNvPicPr>
+            <a:picLocks noChangeAspect="1"/>
+          </p:cNvPicPr>
+          <p:nvPr/>
+        </p:nvPicPr>
+        <p:blipFill>
+          <a:blip r:embed="rId4"/>
+          <a:stretch>
+            <a:fillRect/>
+          </a:stretch>
+        </p:blipFill>
+        <p:spPr>
+          <a:xfrm>
+            <a:off x="368406" y="3500142"/>
+            <a:ext cx="3372321" cy="514422"/>
+          </a:xfrm>
+          <a:prstGeom prst="rect">
+            <a:avLst/>
+          </a:prstGeom>
+        </p:spPr>
+      </p:pic>
+      <p:pic>
+        <p:nvPicPr>
+          <p:cNvPr id="8" name="Рисунок 7"/>
+          <p:cNvPicPr>
+            <a:picLocks noChangeAspect="1"/>
+          </p:cNvPicPr>
+          <p:nvPr/>
+        </p:nvPicPr>
+        <p:blipFill>
+          <a:blip r:embed="rId5"/>
+          <a:stretch>
+            <a:fillRect/>
+          </a:stretch>
+        </p:blipFill>
+        <p:spPr>
+          <a:xfrm>
+            <a:off x="161536" y="4170911"/>
+            <a:ext cx="3833290" cy="1667450"/>
+          </a:xfrm>
+          <a:prstGeom prst="rect">
+            <a:avLst/>
+          </a:prstGeom>
+        </p:spPr>
+      </p:pic>
+      <p:pic>
+        <p:nvPicPr>
+          <p:cNvPr id="9" name="Рисунок 8"/>
+          <p:cNvPicPr>
+            <a:picLocks noChangeAspect="1"/>
+          </p:cNvPicPr>
+          <p:nvPr/>
+        </p:nvPicPr>
+        <p:blipFill>
+          <a:blip r:embed="rId6"/>
+          <a:stretch>
+            <a:fillRect/>
+          </a:stretch>
+        </p:blipFill>
+        <p:spPr>
+          <a:xfrm>
+            <a:off x="4306414" y="3757353"/>
+            <a:ext cx="3579172" cy="106078"/>
+          </a:xfrm>
+          <a:prstGeom prst="rect">
+            <a:avLst/>
+          </a:prstGeom>
+        </p:spPr>
+      </p:pic>
     </p:spTree>
   </p:cSld>
   <p:clrMapOvr>
     <a:masterClrMapping/>
   </p:clrMapOvr>
+  <p:timing>
+    <p:tnLst>
+      <p:par>
+        <p:cTn id="1" dur="indefinite" restart="never" nodeType="tmRoot"/>
+      </p:par>
+    </p:tnLst>
+  </p:timing>
 </p:sld>
 </file>
 
@@ -2131,14 +1926,14 @@
       </p:grpSpPr>
       <p:pic>
         <p:nvPicPr>
-          <p:cNvPr id="2" name="Image 0" descr="preencoded.png">    </p:cNvPr>
+          <p:cNvPr id="2" name="Image 0" descr="preencoded.png"/>
           <p:cNvPicPr>
             <a:picLocks noChangeAspect="1"/>
           </p:cNvPicPr>
           <p:nvPr/>
         </p:nvPicPr>
         <p:blipFill>
-          <a:blip r:embed="rId1"/>
+          <a:blip r:embed="rId3"/>
           <a:stretch>
             <a:fillRect/>
           </a:stretch>
@@ -2174,15 +1969,11 @@
           <a:bodyPr wrap="square" rtlCol="0" anchor="ctr"/>
           <a:lstStyle/>
           <a:p>
-            <a:pPr algn="l" indent="0" marL="0">
+            <a:pPr marL="0" indent="0" algn="l">
               <a:buNone/>
             </a:pPr>
             <a:r>
-              <a:rPr lang="en-US" sz="3200" b="1" dirty="0">
-                <a:solidFill>
-                  <a:srgbClr val="E8E6E3"/>
-                </a:solidFill>
-              </a:rPr>
+              <a:rPr lang="en-US" sz="3200" b="1" dirty="0"/>
               <a:t>Спасибо за внимание!</a:t>
             </a:r>
             <a:endParaRPr lang="en-US" sz="3200" dirty="0"/>
@@ -2210,20 +2001,12 @@
           <a:bodyPr wrap="square" rtlCol="0" anchor="ctr"/>
           <a:lstStyle/>
           <a:p>
-            <a:pPr algn="l" indent="0" marL="0">
+            <a:pPr marL="0" indent="0" algn="l">
               <a:lnSpc>
                 <a:spcPts val="2000"/>
               </a:lnSpc>
               <a:buNone/>
             </a:pPr>
-            <a:r>
-              <a:rPr lang="en-US" sz="1400" dirty="0">
-                <a:solidFill>
-                  <a:srgbClr val="E8E6E3"/>
-                </a:solidFill>
-              </a:rPr>
-              <a:t>Спасибо за внимание. В этой презентации мы рассмотрели ключевые аспекты нашего проекта, включая управление пользователями и контентом, интеграцию с голосовым помощником Алисой, а также технический стек, фронтенд, структуру и связи в базе данных. Мы надеемся, что представленная информация была полезной и поможет вам лучше понять наши технологии и подходы.</a:t>
-            </a:r>
             <a:endParaRPr lang="en-US" sz="1400" dirty="0"/>
           </a:p>
         </p:txBody>
@@ -2233,6 +2016,13 @@
   <p:clrMapOvr>
     <a:masterClrMapping/>
   </p:clrMapOvr>
+  <p:timing>
+    <p:tnLst>
+      <p:par>
+        <p:cTn id="1" dur="indefinite" restart="never" nodeType="tmRoot"/>
+      </p:par>
+    </p:tnLst>
+  </p:timing>
 </p:sld>
 </file>
 
@@ -2255,14 +2045,14 @@
       </p:grpSpPr>
       <p:pic>
         <p:nvPicPr>
-          <p:cNvPr id="2" name="Image 0" descr="preencoded.png">    </p:cNvPr>
+          <p:cNvPr id="2" name="Image 0" descr="preencoded.png"/>
           <p:cNvPicPr>
             <a:picLocks noChangeAspect="1"/>
           </p:cNvPicPr>
           <p:nvPr/>
         </p:nvPicPr>
         <p:blipFill>
-          <a:blip r:embed="rId1"/>
+          <a:blip r:embed="rId3"/>
           <a:stretch>
             <a:fillRect/>
           </a:stretch>
@@ -2298,15 +2088,11 @@
           <a:bodyPr wrap="square" rtlCol="0" anchor="ctr"/>
           <a:lstStyle/>
           <a:p>
-            <a:pPr algn="l" indent="0" marL="0">
+            <a:pPr marL="0" indent="0" algn="l">
               <a:buNone/>
             </a:pPr>
             <a:r>
-              <a:rPr lang="en-US" sz="2200" b="1" dirty="0">
-                <a:solidFill>
-                  <a:srgbClr val="E8E6E3"/>
-                </a:solidFill>
-              </a:rPr>
+              <a:rPr lang="en-US" sz="2200" b="1" dirty="0"/>
               <a:t>Управление пользователями</a:t>
             </a:r>
             <a:endParaRPr lang="en-US" sz="2200" dirty="0"/>
@@ -2321,8 +2107,8 @@
         </p:nvSpPr>
         <p:spPr>
           <a:xfrm>
-            <a:off x="1454727" y="1662545"/>
-            <a:ext cx="6650182" cy="681644"/>
+            <a:off x="1454727" y="1417321"/>
+            <a:ext cx="2978377" cy="1071236"/>
           </a:xfrm>
           <a:prstGeom prst="rect">
             <a:avLst/>
@@ -2334,21 +2120,16 @@
           <a:bodyPr wrap="square" rtlCol="0" anchor="ctr"/>
           <a:lstStyle/>
           <a:p>
-            <a:pPr algn="l" indent="0" marL="0">
+            <a:pPr marL="0" indent="0" algn="l">
               <a:lnSpc>
                 <a:spcPts val="2000"/>
               </a:lnSpc>
               <a:buNone/>
             </a:pPr>
             <a:r>
-              <a:rPr lang="en-US" sz="1400" dirty="0">
-                <a:solidFill>
-                  <a:srgbClr val="E8E6E3"/>
-                </a:solidFill>
-              </a:rPr>
+              <a:rPr lang="en-US" sz="1400" dirty="0"/>
               <a:t>Регистрация: Создание аккаунта с уникальным логином и паролем. Аутентификация: Доступ к функционалу только после входа в систему.</a:t>
             </a:r>
-            <a:endParaRPr lang="en-US" sz="1400" dirty="0"/>
           </a:p>
         </p:txBody>
       </p:sp>
@@ -2360,8 +2141,8 @@
         </p:nvSpPr>
         <p:spPr>
           <a:xfrm>
-            <a:off x="1454727" y="2909455"/>
-            <a:ext cx="6650182" cy="931025"/>
+            <a:off x="1454727" y="2906273"/>
+            <a:ext cx="2978377" cy="934208"/>
           </a:xfrm>
           <a:prstGeom prst="rect">
             <a:avLst/>
@@ -2373,21 +2154,16 @@
           <a:bodyPr wrap="square" rtlCol="0" anchor="ctr"/>
           <a:lstStyle/>
           <a:p>
-            <a:pPr algn="l" indent="0" marL="0">
+            <a:pPr marL="0" indent="0" algn="l">
               <a:lnSpc>
                 <a:spcPts val="2000"/>
               </a:lnSpc>
               <a:buNone/>
             </a:pPr>
             <a:r>
-              <a:rPr lang="en-US" sz="1400" dirty="0">
-                <a:solidFill>
-                  <a:srgbClr val="E8E6E3"/>
-                </a:solidFill>
-              </a:rPr>
+              <a:rPr lang="en-US" sz="1400" dirty="0"/>
               <a:t>Безопасность: Хеширование паролей с помощью werkzeug. security. Восстановление доступа: предусмотрена возможность сброса пароля в случае его забытья.</a:t>
             </a:r>
-            <a:endParaRPr lang="en-US" sz="1400" dirty="0"/>
           </a:p>
         </p:txBody>
       </p:sp>
@@ -2400,7 +2176,7 @@
         <p:spPr>
           <a:xfrm>
             <a:off x="1454727" y="3840480"/>
-            <a:ext cx="6650182" cy="931025"/>
+            <a:ext cx="2978377" cy="2085758"/>
           </a:xfrm>
           <a:prstGeom prst="rect">
             <a:avLst/>
@@ -2412,29 +2188,127 @@
           <a:bodyPr wrap="square" rtlCol="0" anchor="ctr"/>
           <a:lstStyle/>
           <a:p>
-            <a:pPr algn="l" indent="0" marL="0">
+            <a:pPr marL="0" indent="0" algn="l">
               <a:lnSpc>
                 <a:spcPts val="2000"/>
               </a:lnSpc>
               <a:buNone/>
             </a:pPr>
             <a:r>
-              <a:rPr lang="en-US" sz="1400" dirty="0">
-                <a:solidFill>
-                  <a:srgbClr val="E8E6E3"/>
-                </a:solidFill>
-              </a:rPr>
+              <a:rPr lang="en-US" sz="1400" dirty="0"/>
               <a:t>Мониторинг активности: система отслеживает и регистрирует все действия пользователей для обеспечения дополнительной безопасности.</a:t>
             </a:r>
-            <a:endParaRPr lang="en-US" sz="1400" dirty="0"/>
-          </a:p>
-        </p:txBody>
-      </p:sp>
+          </a:p>
+        </p:txBody>
+      </p:sp>
+      <p:pic>
+        <p:nvPicPr>
+          <p:cNvPr id="7" name="Рисунок 6"/>
+          <p:cNvPicPr>
+            <a:picLocks noChangeAspect="1"/>
+          </p:cNvPicPr>
+          <p:nvPr/>
+        </p:nvPicPr>
+        <p:blipFill>
+          <a:blip r:embed="rId4"/>
+          <a:stretch>
+            <a:fillRect/>
+          </a:stretch>
+        </p:blipFill>
+        <p:spPr>
+          <a:xfrm>
+            <a:off x="5706524" y="1013611"/>
+            <a:ext cx="2038163" cy="1764313"/>
+          </a:xfrm>
+          <a:prstGeom prst="rect">
+            <a:avLst/>
+          </a:prstGeom>
+        </p:spPr>
+      </p:pic>
+      <p:pic>
+        <p:nvPicPr>
+          <p:cNvPr id="8" name="Рисунок 7"/>
+          <p:cNvPicPr>
+            <a:picLocks noChangeAspect="1"/>
+          </p:cNvPicPr>
+          <p:nvPr/>
+        </p:nvPicPr>
+        <p:blipFill>
+          <a:blip r:embed="rId5"/>
+          <a:stretch>
+            <a:fillRect/>
+          </a:stretch>
+        </p:blipFill>
+        <p:spPr>
+          <a:xfrm>
+            <a:off x="9018107" y="999606"/>
+            <a:ext cx="2058865" cy="1760145"/>
+          </a:xfrm>
+          <a:prstGeom prst="rect">
+            <a:avLst/>
+          </a:prstGeom>
+        </p:spPr>
+      </p:pic>
+      <p:pic>
+        <p:nvPicPr>
+          <p:cNvPr id="9" name="Рисунок 8"/>
+          <p:cNvPicPr>
+            <a:picLocks noChangeAspect="1"/>
+          </p:cNvPicPr>
+          <p:nvPr/>
+        </p:nvPicPr>
+        <p:blipFill>
+          <a:blip r:embed="rId6"/>
+          <a:stretch>
+            <a:fillRect/>
+          </a:stretch>
+        </p:blipFill>
+        <p:spPr>
+          <a:xfrm>
+            <a:off x="5877480" y="2929877"/>
+            <a:ext cx="5012209" cy="237707"/>
+          </a:xfrm>
+          <a:prstGeom prst="rect">
+            <a:avLst/>
+          </a:prstGeom>
+        </p:spPr>
+      </p:pic>
+      <p:pic>
+        <p:nvPicPr>
+          <p:cNvPr id="10" name="Рисунок 9"/>
+          <p:cNvPicPr>
+            <a:picLocks noChangeAspect="1"/>
+          </p:cNvPicPr>
+          <p:nvPr/>
+        </p:nvPicPr>
+        <p:blipFill>
+          <a:blip r:embed="rId7"/>
+          <a:stretch>
+            <a:fillRect/>
+          </a:stretch>
+        </p:blipFill>
+        <p:spPr>
+          <a:xfrm>
+            <a:off x="5844370" y="3337710"/>
+            <a:ext cx="5232602" cy="1316645"/>
+          </a:xfrm>
+          <a:prstGeom prst="rect">
+            <a:avLst/>
+          </a:prstGeom>
+        </p:spPr>
+      </p:pic>
     </p:spTree>
   </p:cSld>
   <p:clrMapOvr>
     <a:masterClrMapping/>
   </p:clrMapOvr>
+  <p:timing>
+    <p:tnLst>
+      <p:par>
+        <p:cTn id="1" dur="indefinite" restart="never" nodeType="tmRoot"/>
+      </p:par>
+    </p:tnLst>
+  </p:timing>
 </p:sld>
 </file>
 
@@ -2457,21 +2331,21 @@
       </p:grpSpPr>
       <p:pic>
         <p:nvPicPr>
-          <p:cNvPr id="2" name="Image 0" descr="preencoded.png">    </p:cNvPr>
+          <p:cNvPr id="2" name="Image 0" descr="preencoded.png"/>
           <p:cNvPicPr>
             <a:picLocks noChangeAspect="1"/>
           </p:cNvPicPr>
           <p:nvPr/>
         </p:nvPicPr>
         <p:blipFill>
-          <a:blip r:embed="rId1"/>
+          <a:blip r:embed="rId3"/>
           <a:stretch>
             <a:fillRect/>
           </a:stretch>
         </p:blipFill>
         <p:spPr>
           <a:xfrm>
-            <a:off x="0" y="0"/>
+            <a:off x="0" y="417715"/>
             <a:ext cx="12192000" cy="6858000"/>
           </a:xfrm>
           <a:prstGeom prst="rect">
@@ -2500,15 +2374,11 @@
           <a:bodyPr wrap="square" rtlCol="0" anchor="ctr"/>
           <a:lstStyle/>
           <a:p>
-            <a:pPr algn="l" indent="0" marL="0">
+            <a:pPr marL="0" indent="0" algn="l">
               <a:buNone/>
             </a:pPr>
             <a:r>
-              <a:rPr lang="en-US" sz="2200" b="1" dirty="0">
-                <a:solidFill>
-                  <a:srgbClr val="E8E6E3"/>
-                </a:solidFill>
-              </a:rPr>
+              <a:rPr lang="en-US" sz="2200" b="1" dirty="0"/>
               <a:t>Управление контентом (веб-панель)</a:t>
             </a:r>
             <a:endParaRPr lang="en-US" sz="2200" dirty="0"/>
@@ -2536,21 +2406,16 @@
           <a:bodyPr wrap="square" rtlCol="0" anchor="ctr"/>
           <a:lstStyle/>
           <a:p>
-            <a:pPr algn="l" indent="0" marL="0">
+            <a:pPr marL="0" indent="0" algn="l">
               <a:lnSpc>
                 <a:spcPts val="2000"/>
               </a:lnSpc>
               <a:buNone/>
             </a:pPr>
             <a:r>
-              <a:rPr lang="en-US" sz="1400" dirty="0">
-                <a:solidFill>
-                  <a:srgbClr val="E8E6E3"/>
-                </a:solidFill>
-              </a:rPr>
+              <a:rPr lang="en-US" sz="1400" dirty="0"/>
               <a:t>Создание предметов: Возможность организации билетов по дисциплинам. Импорт билетов: Загрузка вопросов и ответов из. txt файлов (формат: Вопрос;Ответ). Управление: Удаление предметов вместе с привязанными к ним билетами. Автоматическая генерация новых билетов на основе существующих вопросов и ответов.</a:t>
             </a:r>
-            <a:endParaRPr lang="en-US" sz="1400" dirty="0"/>
           </a:p>
         </p:txBody>
       </p:sp>
@@ -2575,29 +2440,55 @@
           <a:bodyPr wrap="square" rtlCol="0" anchor="ctr"/>
           <a:lstStyle/>
           <a:p>
-            <a:pPr algn="l" indent="0" marL="0">
+            <a:pPr marL="0" indent="0" algn="l">
               <a:lnSpc>
                 <a:spcPts val="2000"/>
               </a:lnSpc>
               <a:buNone/>
             </a:pPr>
             <a:r>
-              <a:rPr lang="en-US" sz="1400" dirty="0">
-                <a:solidFill>
-                  <a:srgbClr val="E8E6E3"/>
-                </a:solidFill>
-              </a:rPr>
+              <a:rPr lang="en-US" sz="1400" dirty="0"/>
               <a:t>Возможность экспорта билетов в. txt файлы для дальнейшего использования.</a:t>
             </a:r>
-            <a:endParaRPr lang="en-US" sz="1400" dirty="0"/>
-          </a:p>
-        </p:txBody>
-      </p:sp>
+          </a:p>
+        </p:txBody>
+      </p:sp>
+      <p:pic>
+        <p:nvPicPr>
+          <p:cNvPr id="6" name="Рисунок 5"/>
+          <p:cNvPicPr>
+            <a:picLocks noChangeAspect="1"/>
+          </p:cNvPicPr>
+          <p:nvPr/>
+        </p:nvPicPr>
+        <p:blipFill>
+          <a:blip r:embed="rId4"/>
+          <a:stretch>
+            <a:fillRect/>
+          </a:stretch>
+        </p:blipFill>
+        <p:spPr>
+          <a:xfrm>
+            <a:off x="1454727" y="4089861"/>
+            <a:ext cx="4156364" cy="1823557"/>
+          </a:xfrm>
+          <a:prstGeom prst="rect">
+            <a:avLst/>
+          </a:prstGeom>
+        </p:spPr>
+      </p:pic>
     </p:spTree>
   </p:cSld>
   <p:clrMapOvr>
     <a:masterClrMapping/>
   </p:clrMapOvr>
+  <p:timing>
+    <p:tnLst>
+      <p:par>
+        <p:cTn id="1" dur="indefinite" restart="never" nodeType="tmRoot"/>
+      </p:par>
+    </p:tnLst>
+  </p:timing>
 </p:sld>
 </file>
 
@@ -2620,14 +2511,14 @@
       </p:grpSpPr>
       <p:pic>
         <p:nvPicPr>
-          <p:cNvPr id="2" name="Image 0" descr="preencoded.png">    </p:cNvPr>
+          <p:cNvPr id="2" name="Image 0" descr="preencoded.png"/>
           <p:cNvPicPr>
             <a:picLocks noChangeAspect="1"/>
           </p:cNvPicPr>
           <p:nvPr/>
         </p:nvPicPr>
         <p:blipFill>
-          <a:blip r:embed="rId1"/>
+          <a:blip r:embed="rId3"/>
           <a:stretch>
             <a:fillRect/>
           </a:stretch>
@@ -2663,15 +2554,11 @@
           <a:bodyPr wrap="square" rtlCol="0" anchor="ctr"/>
           <a:lstStyle/>
           <a:p>
-            <a:pPr algn="l" indent="0" marL="0">
+            <a:pPr marL="0" indent="0" algn="l">
               <a:buNone/>
             </a:pPr>
             <a:r>
-              <a:rPr lang="en-US" sz="2200" b="1" dirty="0">
-                <a:solidFill>
-                  <a:srgbClr val="E8E6E3"/>
-                </a:solidFill>
-              </a:rPr>
+              <a:rPr lang="en-US" sz="2200" b="1" dirty="0"/>
               <a:t>Голосовой навык (интеграция с Алисой)</a:t>
             </a:r>
             <a:endParaRPr lang="en-US" sz="2200" dirty="0"/>
@@ -2687,7 +2574,7 @@
         <p:spPr>
           <a:xfrm>
             <a:off x="1246909" y="1662545"/>
-            <a:ext cx="9144000" cy="931025"/>
+            <a:ext cx="3664725" cy="931025"/>
           </a:xfrm>
           <a:prstGeom prst="rect">
             <a:avLst/>
@@ -2699,20 +2586,115 @@
           <a:bodyPr wrap="square" rtlCol="0" anchor="ctr"/>
           <a:lstStyle/>
           <a:p>
-            <a:pPr algn="l" indent="0" marL="0">
+            <a:pPr>
+              <a:lnSpc>
+                <a:spcPts val="2000"/>
+              </a:lnSpc>
+            </a:pPr>
+            <a:r>
+              <a:rPr lang="en-US" sz="1400" dirty="0"/>
+              <a:t>Выбор предмета: Нечёткий поиск по названию (коэффициент сходства 0. 6). Процесс тестирования: Случайная выборка билетов из базы данных. Проверка ответов: Сравнение ответа пользователя с эталоном (порог сходства 0</a:t>
+            </a:r>
+            <a:r>
+              <a:rPr lang="en-US" sz="1400" dirty="0"/>
+              <a:t>. 65). </a:t>
+            </a:r>
+            <a:r>
+              <a:rPr lang="en-US" sz="1400" dirty="0" err="1"/>
+              <a:t>Оценка</a:t>
+            </a:r>
+            <a:r>
+              <a:rPr lang="en-US" sz="1400" dirty="0"/>
+              <a:t> </a:t>
+            </a:r>
+            <a:r>
+              <a:rPr lang="en-US" sz="1400" dirty="0" err="1"/>
+              <a:t>результатов</a:t>
+            </a:r>
+            <a:r>
+              <a:rPr lang="en-US" sz="1400" dirty="0"/>
+              <a:t> </a:t>
+            </a:r>
+            <a:r>
+              <a:rPr lang="en-US" sz="1400" dirty="0" err="1"/>
+              <a:t>тестирования</a:t>
+            </a:r>
+            <a:r>
+              <a:rPr lang="en-US" sz="1400" dirty="0"/>
+              <a:t>: </a:t>
+            </a:r>
+            <a:r>
+              <a:rPr lang="en-US" sz="1400" dirty="0" err="1"/>
+              <a:t>подсчёт</a:t>
+            </a:r>
+            <a:r>
+              <a:rPr lang="en-US" sz="1400" dirty="0"/>
+              <a:t> </a:t>
+            </a:r>
+            <a:r>
+              <a:rPr lang="en-US" sz="1400" dirty="0" err="1"/>
+              <a:t>процента</a:t>
+            </a:r>
+            <a:r>
+              <a:rPr lang="en-US" sz="1400" dirty="0"/>
+              <a:t> </a:t>
+            </a:r>
+            <a:r>
+              <a:rPr lang="en-US" sz="1400" dirty="0" err="1"/>
+              <a:t>правильных</a:t>
+            </a:r>
+            <a:r>
+              <a:rPr lang="en-US" sz="1400" dirty="0"/>
+              <a:t> </a:t>
+            </a:r>
+            <a:r>
+              <a:rPr lang="en-US" sz="1400" dirty="0" err="1"/>
+              <a:t>ответов</a:t>
+            </a:r>
+            <a:r>
+              <a:rPr lang="en-US" sz="1400" dirty="0"/>
+              <a:t> </a:t>
+            </a:r>
+            <a:r>
+              <a:rPr lang="en-US" sz="1400" dirty="0" err="1"/>
+              <a:t>относительно</a:t>
+            </a:r>
+            <a:r>
+              <a:rPr lang="en-US" sz="1400" dirty="0"/>
+              <a:t> </a:t>
+            </a:r>
+            <a:r>
+              <a:rPr lang="en-US" sz="1400" dirty="0" err="1"/>
+              <a:t>общего</a:t>
+            </a:r>
+            <a:r>
+              <a:rPr lang="en-US" sz="1400" dirty="0"/>
+              <a:t> </a:t>
+            </a:r>
+            <a:r>
+              <a:rPr lang="en-US" sz="1400" dirty="0" err="1"/>
+              <a:t>числа</a:t>
+            </a:r>
+            <a:r>
+              <a:rPr lang="en-US" sz="1400" dirty="0"/>
+              <a:t> </a:t>
+            </a:r>
+            <a:r>
+              <a:rPr lang="en-US" sz="1400" dirty="0" err="1"/>
+              <a:t>попыток</a:t>
+            </a:r>
+            <a:r>
+              <a:rPr lang="en-US" sz="1400" dirty="0"/>
+              <a:t>.</a:t>
+            </a:r>
+          </a:p>
+          <a:p>
+            <a:pPr marL="0" indent="0" algn="l">
               <a:lnSpc>
                 <a:spcPts val="2000"/>
               </a:lnSpc>
               <a:buNone/>
             </a:pPr>
-            <a:r>
-              <a:rPr lang="en-US" sz="1400" dirty="0">
-                <a:solidFill>
-                  <a:srgbClr val="E8E6E3"/>
-                </a:solidFill>
-              </a:rPr>
-              <a:t>Выбор предмета: Нечёткий поиск по названию (коэффициент сходства 0. 6). Процесс тестирования: Случайная выборка билетов из базы данных. Проверка ответов: Сравнение ответа пользователя с эталоном (порог сходства 0.</a:t>
-            </a:r>
             <a:endParaRPr lang="en-US" sz="1400" dirty="0"/>
           </a:p>
         </p:txBody>
@@ -2738,68 +2720,112 @@
           <a:bodyPr wrap="square" rtlCol="0" anchor="ctr"/>
           <a:lstStyle/>
           <a:p>
-            <a:pPr algn="l" indent="0" marL="0">
+            <a:pPr>
+              <a:lnSpc>
+                <a:spcPts val="2000"/>
+              </a:lnSpc>
+            </a:pPr>
+            <a:endParaRPr lang="en-US" sz="1400" dirty="0"/>
+          </a:p>
+        </p:txBody>
+      </p:sp>
+      <p:sp>
+        <p:nvSpPr>
+          <p:cNvPr id="6" name="Text 3"/>
+          <p:cNvSpPr/>
+          <p:nvPr/>
+        </p:nvSpPr>
+        <p:spPr>
+          <a:xfrm>
+            <a:off x="7065818" y="4156364"/>
+            <a:ext cx="4156364" cy="931025"/>
+          </a:xfrm>
+          <a:prstGeom prst="rect">
+            <a:avLst/>
+          </a:prstGeom>
+          <a:noFill/>
+          <a:ln/>
+        </p:spPr>
+        <p:txBody>
+          <a:bodyPr wrap="square" rtlCol="0" anchor="ctr"/>
+          <a:lstStyle/>
+          <a:p>
+            <a:pPr marL="0" indent="0" algn="l">
               <a:lnSpc>
                 <a:spcPts val="2000"/>
               </a:lnSpc>
               <a:buNone/>
             </a:pPr>
-            <a:r>
-              <a:rPr lang="en-US" sz="1400" dirty="0">
-                <a:solidFill>
-                  <a:srgbClr val="E8E6E3"/>
-                </a:solidFill>
-              </a:rPr>
-              <a:t>65). Оценка результатов тестирования: подсчёт процента правильных ответов относительно общего числа попыток.</a:t>
-            </a:r>
             <a:endParaRPr lang="en-US" sz="1400" dirty="0"/>
           </a:p>
         </p:txBody>
       </p:sp>
       <p:sp>
         <p:nvSpPr>
-          <p:cNvPr id="6" name="Text 3"/>
+          <p:cNvPr id="7" name="Прямоугольник 6"/>
           <p:cNvSpPr/>
           <p:nvPr/>
         </p:nvSpPr>
         <p:spPr>
           <a:xfrm>
-            <a:off x="7065818" y="4156364"/>
-            <a:ext cx="4156364" cy="931025"/>
-          </a:xfrm>
-          <a:prstGeom prst="rect">
-            <a:avLst/>
-          </a:prstGeom>
-          <a:noFill/>
-          <a:ln/>
-        </p:spPr>
-        <p:txBody>
-          <a:bodyPr wrap="square" rtlCol="0" anchor="ctr"/>
-          <a:lstStyle/>
-          <a:p>
-            <a:pPr algn="l" indent="0" marL="0">
+            <a:off x="1246911" y="4241074"/>
+            <a:ext cx="3664724" cy="332079"/>
+          </a:xfrm>
+          <a:prstGeom prst="rect">
+            <a:avLst/>
+          </a:prstGeom>
+        </p:spPr>
+        <p:txBody>
+          <a:bodyPr wrap="square">
+            <a:spAutoFit/>
+          </a:bodyPr>
+          <a:lstStyle/>
+          <a:p>
+            <a:pPr>
               <a:lnSpc>
                 <a:spcPts val="2000"/>
               </a:lnSpc>
-              <a:buNone/>
             </a:pPr>
-            <a:r>
-              <a:rPr lang="en-US" sz="1400" dirty="0">
-                <a:solidFill>
-                  <a:srgbClr val="E8E6E3"/>
-                </a:solidFill>
-              </a:rPr>
-              <a:t>Анализ данных: выявление типичных ошибок пользователей для последующей корректировки материалов.</a:t>
-            </a:r>
             <a:endParaRPr lang="en-US" sz="1400" dirty="0"/>
           </a:p>
         </p:txBody>
       </p:sp>
+      <p:pic>
+        <p:nvPicPr>
+          <p:cNvPr id="8" name="Рисунок 7"/>
+          <p:cNvPicPr>
+            <a:picLocks noChangeAspect="1"/>
+          </p:cNvPicPr>
+          <p:nvPr/>
+        </p:nvPicPr>
+        <p:blipFill>
+          <a:blip r:embed="rId4"/>
+          <a:stretch>
+            <a:fillRect/>
+          </a:stretch>
+        </p:blipFill>
+        <p:spPr>
+          <a:xfrm>
+            <a:off x="5197204" y="1415653"/>
+            <a:ext cx="6709225" cy="938516"/>
+          </a:xfrm>
+          <a:prstGeom prst="rect">
+            <a:avLst/>
+          </a:prstGeom>
+        </p:spPr>
+      </p:pic>
     </p:spTree>
   </p:cSld>
   <p:clrMapOvr>
     <a:masterClrMapping/>
   </p:clrMapOvr>
+  <p:timing>
+    <p:tnLst>
+      <p:par>
+        <p:cTn id="1" dur="indefinite" restart="never" nodeType="tmRoot"/>
+      </p:par>
+    </p:tnLst>
+  </p:timing>
 </p:sld>
 </file>
 
@@ -2822,14 +2848,14 @@
       </p:grpSpPr>
       <p:pic>
         <p:nvPicPr>
-          <p:cNvPr id="2" name="Image 0" descr="preencoded.png">    </p:cNvPr>
+          <p:cNvPr id="2" name="Image 0" descr="preencoded.png"/>
           <p:cNvPicPr>
             <a:picLocks noChangeAspect="1"/>
           </p:cNvPicPr>
           <p:nvPr/>
         </p:nvPicPr>
         <p:blipFill>
-          <a:blip r:embed="rId1"/>
+          <a:blip r:embed="rId3"/>
           <a:stretch>
             <a:fillRect/>
           </a:stretch>
@@ -2865,15 +2891,11 @@
           <a:bodyPr wrap="square" rtlCol="0" anchor="ctr"/>
           <a:lstStyle/>
           <a:p>
-            <a:pPr algn="l" indent="0" marL="0">
+            <a:pPr marL="0" indent="0" algn="l">
               <a:buNone/>
             </a:pPr>
             <a:r>
-              <a:rPr lang="en-US" sz="2200" b="1" dirty="0">
-                <a:solidFill>
-                  <a:srgbClr val="E8E6E3"/>
-                </a:solidFill>
-              </a:rPr>
+              <a:rPr lang="en-US" sz="2200" b="1" dirty="0"/>
               <a:t>Навигация голосового навыка</a:t>
             </a:r>
             <a:endParaRPr lang="en-US" sz="2200" dirty="0"/>
@@ -2889,7 +2911,7 @@
         <p:spPr>
           <a:xfrm>
             <a:off x="1454727" y="1662545"/>
-            <a:ext cx="6650182" cy="681644"/>
+            <a:ext cx="2654286" cy="681644"/>
           </a:xfrm>
           <a:prstGeom prst="rect">
             <a:avLst/>
@@ -2901,21 +2923,16 @@
           <a:bodyPr wrap="square" rtlCol="0" anchor="ctr"/>
           <a:lstStyle/>
           <a:p>
-            <a:pPr algn="l" indent="0" marL="0">
+            <a:pPr marL="0" indent="0" algn="l">
               <a:lnSpc>
                 <a:spcPts val="2000"/>
               </a:lnSpc>
               <a:buNone/>
             </a:pPr>
             <a:r>
-              <a:rPr lang="en-US" sz="1400" dirty="0">
-                <a:solidFill>
-                  <a:srgbClr val="E8E6E3"/>
-                </a:solidFill>
-              </a:rPr>
+              <a:rPr lang="en-US" sz="1400" dirty="0"/>
               <a:t>Навигация: Поддержка команд смены предмета ("назад", "стоп", "другой предмет") и пропуска вопроса ("дальше", "не знаю").</a:t>
             </a:r>
-            <a:endParaRPr lang="en-US" sz="1400" dirty="0"/>
           </a:p>
         </p:txBody>
       </p:sp>
@@ -2940,20 +2957,12 @@
           <a:bodyPr wrap="square" rtlCol="0" anchor="ctr"/>
           <a:lstStyle/>
           <a:p>
-            <a:pPr algn="l" indent="0" marL="0">
+            <a:pPr marL="0" indent="0" algn="l">
               <a:lnSpc>
                 <a:spcPts val="2000"/>
               </a:lnSpc>
               <a:buNone/>
             </a:pPr>
-            <a:r>
-              <a:rPr lang="en-US" sz="1400" dirty="0">
-                <a:solidFill>
-                  <a:srgbClr val="E8E6E3"/>
-                </a:solidFill>
-              </a:rPr>
-              <a:t>Пользователь может настроить удобные для себя комбинации клавиш для выполнения команд навигации.</a:t>
-            </a:r>
             <a:endParaRPr lang="en-US" sz="1400" dirty="0"/>
           </a:p>
         </p:txBody>
@@ -2967,7 +2976,7 @@
         <p:spPr>
           <a:xfrm>
             <a:off x="1454727" y="3740727"/>
-            <a:ext cx="6650182" cy="681644"/>
+            <a:ext cx="2654286" cy="681644"/>
           </a:xfrm>
           <a:prstGeom prst="rect">
             <a:avLst/>
@@ -2979,29 +2988,79 @@
           <a:bodyPr wrap="square" rtlCol="0" anchor="ctr"/>
           <a:lstStyle/>
           <a:p>
-            <a:pPr algn="l" indent="0" marL="0">
+            <a:pPr marL="0" indent="0" algn="l">
               <a:lnSpc>
                 <a:spcPts val="2000"/>
               </a:lnSpc>
               <a:buNone/>
             </a:pPr>
             <a:r>
-              <a:rPr lang="en-US" sz="1400" dirty="0">
-                <a:solidFill>
-                  <a:srgbClr val="E8E6E3"/>
-                </a:solidFill>
-              </a:rPr>
+              <a:rPr lang="en-US" sz="1400" dirty="0"/>
               <a:t>Система автоматически сохраняет историю взаимодействий для удобства возврата к ранее просмотренным вопросам.</a:t>
             </a:r>
-            <a:endParaRPr lang="en-US" sz="1400" dirty="0"/>
-          </a:p>
-        </p:txBody>
-      </p:sp>
+          </a:p>
+        </p:txBody>
+      </p:sp>
+      <p:pic>
+        <p:nvPicPr>
+          <p:cNvPr id="7" name="Рисунок 6"/>
+          <p:cNvPicPr>
+            <a:picLocks noChangeAspect="1"/>
+          </p:cNvPicPr>
+          <p:nvPr/>
+        </p:nvPicPr>
+        <p:blipFill>
+          <a:blip r:embed="rId4"/>
+          <a:stretch>
+            <a:fillRect/>
+          </a:stretch>
+        </p:blipFill>
+        <p:spPr>
+          <a:xfrm>
+            <a:off x="4430882" y="1417321"/>
+            <a:ext cx="7439249" cy="708897"/>
+          </a:xfrm>
+          <a:prstGeom prst="rect">
+            <a:avLst/>
+          </a:prstGeom>
+        </p:spPr>
+      </p:pic>
+      <p:pic>
+        <p:nvPicPr>
+          <p:cNvPr id="8" name="Рисунок 7"/>
+          <p:cNvPicPr>
+            <a:picLocks noChangeAspect="1"/>
+          </p:cNvPicPr>
+          <p:nvPr/>
+        </p:nvPicPr>
+        <p:blipFill>
+          <a:blip r:embed="rId5"/>
+          <a:stretch>
+            <a:fillRect/>
+          </a:stretch>
+        </p:blipFill>
+        <p:spPr>
+          <a:xfrm>
+            <a:off x="5006817" y="2543933"/>
+            <a:ext cx="6287377" cy="533474"/>
+          </a:xfrm>
+          <a:prstGeom prst="rect">
+            <a:avLst/>
+          </a:prstGeom>
+        </p:spPr>
+      </p:pic>
     </p:spTree>
   </p:cSld>
   <p:clrMapOvr>
     <a:masterClrMapping/>
   </p:clrMapOvr>
+  <p:timing>
+    <p:tnLst>
+      <p:par>
+        <p:cTn id="1" dur="indefinite" restart="never" nodeType="tmRoot"/>
+      </p:par>
+    </p:tnLst>
+  </p:timing>
 </p:sld>
 </file>
 
@@ -3024,14 +3083,14 @@
       </p:grpSpPr>
       <p:pic>
         <p:nvPicPr>
-          <p:cNvPr id="2" name="Image 0" descr="preencoded.png">    </p:cNvPr>
+          <p:cNvPr id="2" name="Image 0" descr="preencoded.png"/>
           <p:cNvPicPr>
             <a:picLocks noChangeAspect="1"/>
           </p:cNvPicPr>
           <p:nvPr/>
         </p:nvPicPr>
         <p:blipFill>
-          <a:blip r:embed="rId1"/>
+          <a:blip r:embed="rId3"/>
           <a:stretch>
             <a:fillRect/>
           </a:stretch>
@@ -3067,15 +3126,11 @@
           <a:bodyPr wrap="square" rtlCol="0" anchor="ctr"/>
           <a:lstStyle/>
           <a:p>
-            <a:pPr algn="l" indent="0" marL="0">
+            <a:pPr marL="0" indent="0" algn="l">
               <a:buNone/>
             </a:pPr>
             <a:r>
-              <a:rPr lang="en-US" sz="2200" b="1" dirty="0">
-                <a:solidFill>
-                  <a:srgbClr val="E8E6E3"/>
-                </a:solidFill>
-              </a:rPr>
+              <a:rPr lang="en-US" sz="2200" b="1" dirty="0"/>
               <a:t>Технический стек</a:t>
             </a:r>
             <a:endParaRPr lang="en-US" sz="2200" dirty="0"/>
@@ -3103,21 +3158,16 @@
           <a:bodyPr wrap="square" rtlCol="0" anchor="ctr"/>
           <a:lstStyle/>
           <a:p>
-            <a:pPr algn="l" indent="0" marL="0">
+            <a:pPr marL="0" indent="0" algn="l">
               <a:lnSpc>
                 <a:spcPts val="2000"/>
               </a:lnSpc>
               <a:buNone/>
             </a:pPr>
             <a:r>
-              <a:rPr lang="en-US" sz="1400" dirty="0">
-                <a:solidFill>
-                  <a:srgbClr val="E8E6E3"/>
-                </a:solidFill>
-              </a:rPr>
+              <a:rPr lang="en-US" sz="1400" dirty="0"/>
               <a:t>Язык: Python 3. x.</a:t>
             </a:r>
-            <a:endParaRPr lang="en-US" sz="1400" dirty="0"/>
           </a:p>
         </p:txBody>
       </p:sp>
@@ -3142,19 +3192,19 @@
           <a:bodyPr wrap="square" rtlCol="0" anchor="ctr"/>
           <a:lstStyle/>
           <a:p>
-            <a:pPr algn="l" indent="0" marL="0">
+            <a:pPr marL="0" indent="0" algn="l">
               <a:lnSpc>
                 <a:spcPts val="2000"/>
               </a:lnSpc>
               <a:buNone/>
             </a:pPr>
             <a:r>
-              <a:rPr lang="en-US" sz="1400" dirty="0">
-                <a:solidFill>
-                  <a:srgbClr val="E8E6E3"/>
-                </a:solidFill>
-              </a:rPr>
-              <a:t>Фреймворк: Flask. База данных: SQLite + SQLAlchemy (ORM). Для управления формами и валидации данных используется библиотека Flask-WTF. Для тестирования приложения применяется фреймворк pytest.</a:t>
+              <a:rPr lang="en-US" sz="1400" dirty="0"/>
+              <a:t>Фреймворк: Flask. База данных: SQLite + SQLAlchemy (ORM). Для управления формами и валидации данных используется библиотека Flask-WTF</a:t>
+            </a:r>
+            <a:r>
+              <a:rPr lang="en-US" sz="1400" dirty="0" smtClean="0"/>
+              <a:t>.</a:t>
             </a:r>
             <a:endParaRPr lang="en-US" sz="1400" dirty="0"/>
           </a:p>
@@ -3165,6 +3215,13 @@
   <p:clrMapOvr>
     <a:masterClrMapping/>
   </p:clrMapOvr>
+  <p:timing>
+    <p:tnLst>
+      <p:par>
+        <p:cTn id="1" dur="indefinite" restart="never" nodeType="tmRoot"/>
+      </p:par>
+    </p:tnLst>
+  </p:timing>
 </p:sld>
 </file>
 
@@ -3187,14 +3244,14 @@
       </p:grpSpPr>
       <p:pic>
         <p:nvPicPr>
-          <p:cNvPr id="2" name="Image 0" descr="preencoded.png">    </p:cNvPr>
+          <p:cNvPr id="2" name="Image 0" descr="preencoded.png"/>
           <p:cNvPicPr>
             <a:picLocks noChangeAspect="1"/>
           </p:cNvPicPr>
           <p:nvPr/>
         </p:nvPicPr>
         <p:blipFill>
-          <a:blip r:embed="rId1"/>
+          <a:blip r:embed="rId3"/>
           <a:stretch>
             <a:fillRect/>
           </a:stretch>
@@ -3230,15 +3287,11 @@
           <a:bodyPr wrap="square" rtlCol="0" anchor="ctr"/>
           <a:lstStyle/>
           <a:p>
-            <a:pPr algn="l" indent="0" marL="0">
+            <a:pPr marL="0" indent="0" algn="l">
               <a:buNone/>
             </a:pPr>
             <a:r>
-              <a:rPr lang="en-US" sz="2200" b="1" dirty="0">
-                <a:solidFill>
-                  <a:srgbClr val="E8E6E3"/>
-                </a:solidFill>
-              </a:rPr>
+              <a:rPr lang="en-US" sz="2200" b="1" dirty="0"/>
               <a:t>Фронтенд</a:t>
             </a:r>
             <a:endParaRPr lang="en-US" sz="2200" dirty="0"/>
@@ -3266,19 +3319,27 @@
           <a:bodyPr wrap="square" rtlCol="0" anchor="ctr"/>
           <a:lstStyle/>
           <a:p>
-            <a:pPr algn="l" indent="0" marL="0">
+            <a:pPr marL="0" indent="0" algn="l">
               <a:lnSpc>
                 <a:spcPts val="2000"/>
               </a:lnSpc>
               <a:buNone/>
             </a:pPr>
             <a:r>
-              <a:rPr lang="en-US" sz="1400" dirty="0">
-                <a:solidFill>
-                  <a:srgbClr val="E8E6E3"/>
-                </a:solidFill>
-              </a:rPr>
-              <a:t>Фронтенд: HTML5, Bootstrap 5, Jinja2. Интеграция: Yandex Alice Skill API.</a:t>
+              <a:rPr lang="en-US" sz="1400" dirty="0"/>
+              <a:t>Фронтенд: HTML5, Bootstrap 5, Jinja2. Интеграция: </a:t>
+            </a:r>
+            <a:r>
+              <a:rPr lang="en-US" sz="1400" dirty="0" err="1"/>
+              <a:t>Yandex</a:t>
+            </a:r>
+            <a:r>
+              <a:rPr lang="en-US" sz="1400" dirty="0"/>
+              <a:t> </a:t>
+            </a:r>
+            <a:r>
+              <a:rPr lang="en-US" sz="1400" dirty="0" smtClean="0"/>
+              <a:t>Alice.</a:t>
             </a:r>
             <a:endParaRPr lang="en-US" sz="1400" dirty="0"/>
           </a:p>
@@ -3305,21 +3366,16 @@
           <a:bodyPr wrap="square" rtlCol="0" anchor="ctr"/>
           <a:lstStyle/>
           <a:p>
-            <a:pPr algn="l" indent="0" marL="0">
+            <a:pPr marL="0" indent="0" algn="l">
               <a:lnSpc>
                 <a:spcPts val="2000"/>
               </a:lnSpc>
               <a:buNone/>
             </a:pPr>
             <a:r>
-              <a:rPr lang="en-US" sz="1400" dirty="0">
-                <a:solidFill>
-                  <a:srgbClr val="E8E6E3"/>
-                </a:solidFill>
-              </a:rPr>
+              <a:rPr lang="en-US" sz="1400" dirty="0"/>
               <a:t>Для управления визуальными элементами используется CSS, а для создания шаблонов — Jinja2 в связке с Bootstrap 5. Для реализации функционала навыка применяется интеграция с библиотеками и фреймворками, соответствующими стандартам разработки.</a:t>
             </a:r>
-            <a:endParaRPr lang="en-US" sz="1400" dirty="0"/>
           </a:p>
         </p:txBody>
       </p:sp>
@@ -3328,6 +3384,13 @@
   <p:clrMapOvr>
     <a:masterClrMapping/>
   </p:clrMapOvr>
+  <p:timing>
+    <p:tnLst>
+      <p:par>
+        <p:cTn id="1" dur="indefinite" restart="never" nodeType="tmRoot"/>
+      </p:par>
+    </p:tnLst>
+  </p:timing>
 </p:sld>
 </file>
 
@@ -3350,14 +3413,14 @@
       </p:grpSpPr>
       <p:pic>
         <p:nvPicPr>
-          <p:cNvPr id="2" name="Image 0" descr="preencoded.png">    </p:cNvPr>
+          <p:cNvPr id="2" name="Image 0" descr="preencoded.png"/>
           <p:cNvPicPr>
             <a:picLocks noChangeAspect="1"/>
           </p:cNvPicPr>
           <p:nvPr/>
         </p:nvPicPr>
         <p:blipFill>
-          <a:blip r:embed="rId1"/>
+          <a:blip r:embed="rId3"/>
           <a:stretch>
             <a:fillRect/>
           </a:stretch>
@@ -3393,15 +3456,11 @@
           <a:bodyPr wrap="square" rtlCol="0" anchor="ctr"/>
           <a:lstStyle/>
           <a:p>
-            <a:pPr algn="l" indent="0" marL="0">
+            <a:pPr marL="0" indent="0" algn="l">
               <a:buNone/>
             </a:pPr>
             <a:r>
-              <a:rPr lang="en-US" sz="2200" b="1" dirty="0">
-                <a:solidFill>
-                  <a:srgbClr val="E8E6E3"/>
-                </a:solidFill>
-              </a:rPr>
+              <a:rPr lang="en-US" sz="2200" b="1" dirty="0"/>
               <a:t>Структура базы данных</a:t>
             </a:r>
             <a:endParaRPr lang="en-US" sz="2200" dirty="0"/>
@@ -3417,7 +3476,7 @@
         <p:spPr>
           <a:xfrm>
             <a:off x="1454727" y="2078182"/>
-            <a:ext cx="9975273" cy="432262"/>
+            <a:ext cx="2098701" cy="432262"/>
           </a:xfrm>
           <a:prstGeom prst="rect">
             <a:avLst/>
@@ -3429,21 +3488,16 @@
           <a:bodyPr wrap="square" rtlCol="0" anchor="ctr"/>
           <a:lstStyle/>
           <a:p>
-            <a:pPr algn="l" indent="0" marL="0">
+            <a:pPr marL="0" indent="0" algn="l">
               <a:lnSpc>
                 <a:spcPts val="2000"/>
               </a:lnSpc>
               <a:buNone/>
             </a:pPr>
             <a:r>
-              <a:rPr lang="en-US" sz="1400" dirty="0">
-                <a:solidFill>
-                  <a:srgbClr val="E8E6E3"/>
-                </a:solidFill>
-              </a:rPr>
+              <a:rPr lang="en-US" sz="1400" dirty="0"/>
               <a:t>Таблица User: id, username, password_hash. Таблица Subject: id, title, user_id (внешний ключ).</a:t>
             </a:r>
-            <a:endParaRPr lang="en-US" sz="1400" dirty="0"/>
           </a:p>
         </p:txBody>
       </p:sp>
@@ -3455,8 +3509,8 @@
         </p:nvSpPr>
         <p:spPr>
           <a:xfrm>
-            <a:off x="1454727" y="3241964"/>
-            <a:ext cx="9975273" cy="931025"/>
+            <a:off x="1454728" y="3256511"/>
+            <a:ext cx="2098700" cy="2681302"/>
           </a:xfrm>
           <a:prstGeom prst="rect">
             <a:avLst/>
@@ -3468,29 +3522,103 @@
           <a:bodyPr wrap="square" rtlCol="0" anchor="ctr"/>
           <a:lstStyle/>
           <a:p>
-            <a:pPr algn="l" indent="0" marL="0">
+            <a:pPr marL="0" indent="0" algn="l">
               <a:lnSpc>
                 <a:spcPts val="2000"/>
               </a:lnSpc>
               <a:buNone/>
             </a:pPr>
             <a:r>
-              <a:rPr lang="en-US" sz="1400" dirty="0">
-                <a:solidFill>
-                  <a:srgbClr val="E8E6E3"/>
-                </a:solidFill>
-              </a:rPr>
+              <a:rPr lang="en-US" sz="1400" dirty="0"/>
               <a:t>Таблица Ticket: id, question, answer, subject_id (внешний ключ). В таблице User хранится информация о пользователях системы. Таблицы Subject и Ticket обеспечивают связь между темами и вопросами пользователей.</a:t>
             </a:r>
-            <a:endParaRPr lang="en-US" sz="1400" dirty="0"/>
-          </a:p>
-        </p:txBody>
-      </p:sp>
+          </a:p>
+        </p:txBody>
+      </p:sp>
+      <p:pic>
+        <p:nvPicPr>
+          <p:cNvPr id="6" name="Рисунок 5"/>
+          <p:cNvPicPr>
+            <a:picLocks noChangeAspect="1"/>
+          </p:cNvPicPr>
+          <p:nvPr/>
+        </p:nvPicPr>
+        <p:blipFill>
+          <a:blip r:embed="rId4"/>
+          <a:stretch>
+            <a:fillRect/>
+          </a:stretch>
+        </p:blipFill>
+        <p:spPr>
+          <a:xfrm>
+            <a:off x="5008155" y="1357371"/>
+            <a:ext cx="5238020" cy="1873883"/>
+          </a:xfrm>
+          <a:prstGeom prst="rect">
+            <a:avLst/>
+          </a:prstGeom>
+        </p:spPr>
+      </p:pic>
+      <p:pic>
+        <p:nvPicPr>
+          <p:cNvPr id="7" name="Рисунок 6"/>
+          <p:cNvPicPr>
+            <a:picLocks noChangeAspect="1"/>
+          </p:cNvPicPr>
+          <p:nvPr/>
+        </p:nvPicPr>
+        <p:blipFill>
+          <a:blip r:embed="rId5"/>
+          <a:stretch>
+            <a:fillRect/>
+          </a:stretch>
+        </p:blipFill>
+        <p:spPr>
+          <a:xfrm>
+            <a:off x="4513575" y="3476782"/>
+            <a:ext cx="6227180" cy="1236551"/>
+          </a:xfrm>
+          <a:prstGeom prst="rect">
+            <a:avLst/>
+          </a:prstGeom>
+        </p:spPr>
+      </p:pic>
+      <p:pic>
+        <p:nvPicPr>
+          <p:cNvPr id="8" name="Рисунок 7"/>
+          <p:cNvPicPr>
+            <a:picLocks noChangeAspect="1"/>
+          </p:cNvPicPr>
+          <p:nvPr/>
+        </p:nvPicPr>
+        <p:blipFill>
+          <a:blip r:embed="rId6"/>
+          <a:stretch>
+            <a:fillRect/>
+          </a:stretch>
+        </p:blipFill>
+        <p:spPr>
+          <a:xfrm>
+            <a:off x="4497258" y="4958861"/>
+            <a:ext cx="6750911" cy="1058840"/>
+          </a:xfrm>
+          <a:prstGeom prst="rect">
+            <a:avLst/>
+          </a:prstGeom>
+        </p:spPr>
+      </p:pic>
     </p:spTree>
   </p:cSld>
   <p:clrMapOvr>
     <a:masterClrMapping/>
   </p:clrMapOvr>
+  <p:timing>
+    <p:tnLst>
+      <p:par>
+        <p:cTn id="1" dur="indefinite" restart="never" nodeType="tmRoot"/>
+      </p:par>
+    </p:tnLst>
+  </p:timing>
 </p:sld>
 </file>
 
@@ -3513,14 +3641,14 @@
       </p:grpSpPr>
       <p:pic>
         <p:nvPicPr>
-          <p:cNvPr id="2" name="Image 0" descr="preencoded.png">    </p:cNvPr>
+          <p:cNvPr id="2" name="Image 0" descr="preencoded.png"/>
           <p:cNvPicPr>
             <a:picLocks noChangeAspect="1"/>
           </p:cNvPicPr>
           <p:nvPr/>
         </p:nvPicPr>
         <p:blipFill>
-          <a:blip r:embed="rId1"/>
+          <a:blip r:embed="rId3"/>
           <a:stretch>
             <a:fillRect/>
           </a:stretch>
@@ -3556,15 +3684,11 @@
           <a:bodyPr wrap="square" rtlCol="0" anchor="ctr"/>
           <a:lstStyle/>
           <a:p>
-            <a:pPr algn="l" indent="0" marL="0">
+            <a:pPr marL="0" indent="0" algn="l">
               <a:buNone/>
             </a:pPr>
             <a:r>
-              <a:rPr lang="en-US" sz="2200" b="1" dirty="0">
-                <a:solidFill>
-                  <a:srgbClr val="E8E6E3"/>
-                </a:solidFill>
-              </a:rPr>
+              <a:rPr lang="en-US" sz="2200" b="1" dirty="0"/>
               <a:t>Связи в базе данных</a:t>
             </a:r>
             <a:endParaRPr lang="en-US" sz="2200" dirty="0"/>
@@ -3592,21 +3716,16 @@
           <a:bodyPr wrap="square" rtlCol="0" anchor="ctr"/>
           <a:lstStyle/>
           <a:p>
-            <a:pPr algn="l" indent="0" marL="0">
+            <a:pPr marL="0" indent="0" algn="l">
               <a:lnSpc>
                 <a:spcPts val="2000"/>
               </a:lnSpc>
               <a:buNone/>
             </a:pPr>
             <a:r>
-              <a:rPr lang="en-US" sz="1400" dirty="0">
-                <a:solidFill>
-                  <a:srgbClr val="E8E6E3"/>
-                </a:solidFill>
-              </a:rPr>
+              <a:rPr lang="en-US" sz="1400" dirty="0"/>
               <a:t>Связи: Каскадное удаление (delete-orphan) для всех дочерних элементов.</a:t>
             </a:r>
-            <a:endParaRPr lang="en-US" sz="1400" dirty="0"/>
           </a:p>
         </p:txBody>
       </p:sp>
@@ -3631,19 +3750,23 @@
           <a:bodyPr wrap="square" rtlCol="0" anchor="ctr"/>
           <a:lstStyle/>
           <a:p>
-            <a:pPr algn="l" indent="0" marL="0">
+            <a:pPr marL="0" indent="0" algn="l">
               <a:lnSpc>
                 <a:spcPts val="2000"/>
               </a:lnSpc>
               <a:buNone/>
             </a:pPr>
             <a:r>
-              <a:rPr lang="en-US" sz="1400" dirty="0">
-                <a:solidFill>
-                  <a:srgbClr val="E8E6E3"/>
-                </a:solidFill>
-              </a:rPr>
-              <a:t>Это позволяет избежать появления «сиротских» записей в базе данных. Полезно при удалении основного объекта, к которому привязаны зависимые элементы.</a:t>
+              <a:rPr lang="en-US" sz="1400" dirty="0"/>
+              <a:t>Это позволяет избежать появления «сиротских» записей в базе </a:t>
+            </a:r>
+            <a:r>
+              <a:rPr lang="en-US" sz="1400" dirty="0" err="1"/>
+              <a:t>данных</a:t>
+            </a:r>
+            <a:r>
+              <a:rPr lang="en-US" sz="1400" dirty="0" smtClean="0"/>
+              <a:t>.</a:t>
             </a:r>
             <a:endParaRPr lang="en-US" sz="1400" dirty="0"/>
           </a:p>
@@ -3654,6 +3777,13 @@
   <p:clrMapOvr>
     <a:masterClrMapping/>
   </p:clrMapOvr>
+  <p:timing>
+    <p:tnLst>
+      <p:par>
+        <p:cTn id="1" dur="indefinite" restart="never" nodeType="tmRoot"/>
+      </p:par>
+    </p:tnLst>
+  </p:timing>
 </p:sld>
 </file>
 
@@ -3950,4 +4080,265 @@
     </a:ext>
   </a:extLst>
 </a:theme>
+</file>
+
+<file path=ppt/theme/theme2.xml><?xml version="1.0" encoding="utf-8"?>
+<a:theme xmlns:a="http://schemas.openxmlformats.org/drawingml/2006/main" name="Тема Office">
+  <a:themeElements>
+    <a:clrScheme name="Стандартная">
+      <a:dk1>
+        <a:sysClr val="windowText" lastClr="000000"/>
+      </a:dk1>
+      <a:lt1>
+        <a:sysClr val="window" lastClr="FFFFFF"/>
+      </a:lt1>
+      <a:dk2>
+        <a:srgbClr val="44546A"/>
+      </a:dk2>
+      <a:lt2>
+        <a:srgbClr val="E7E6E6"/>
+      </a:lt2>
+      <a:accent1>
+        <a:srgbClr val="5B9BD5"/>
+      </a:accent1>
+      <a:accent2>
+        <a:srgbClr val="ED7D31"/>
+      </a:accent2>
+      <a:accent3>
+        <a:srgbClr val="A5A5A5"/>
+      </a:accent3>
+      <a:accent4>
+        <a:srgbClr val="FFC000"/>
+      </a:accent4>
+      <a:accent5>
+        <a:srgbClr val="4472C4"/>
+      </a:accent5>
+      <a:accent6>
+        <a:srgbClr val="70AD47"/>
+      </a:accent6>
+      <a:hlink>
+        <a:srgbClr val="0563C1"/>
+      </a:hlink>
+      <a:folHlink>
+        <a:srgbClr val="954F72"/>
+      </a:folHlink>
+    </a:clrScheme>
+    <a:fontScheme name="Стандартная">
+      <a:majorFont>
+        <a:latin typeface="Calibri Light" panose="020F0302020204030204"/>
+        <a:ea typeface=""/>
+        <a:cs typeface=""/>
+        <a:font script="Jpan" typeface="游ゴシック Light"/>
+        <a:font script="Hang" typeface="맑은 고딕"/>
+        <a:font script="Hans" typeface="等线 Light"/>
+        <a:font script="Hant" typeface="新細明體"/>
+        <a:font script="Arab" typeface="Times New Roman"/>
+        <a:font script="Hebr" typeface="Times New Roman"/>
+        <a:font script="Thai" typeface="Angsana New"/>
+        <a:font script="Ethi" typeface="Nyala"/>
+        <a:font script="Beng" typeface="Vrinda"/>
+        <a:font script="Gujr" typeface="Shruti"/>
+        <a:font script="Khmr" typeface="MoolBoran"/>
+        <a:font script="Knda" typeface="Tunga"/>
+        <a:font script="Guru" typeface="Raavi"/>
+        <a:font script="Cans" typeface="Euphemia"/>
+        <a:font script="Cher" typeface="Plantagenet Cherokee"/>
+        <a:font script="Yiii" typeface="Microsoft Yi Baiti"/>
+        <a:font script="Tibt" typeface="Microsoft Himalaya"/>
+        <a:font script="Thaa" typeface="MV Boli"/>
+        <a:font script="Deva" typeface="Mangal"/>
+        <a:font script="Telu" typeface="Gautami"/>
+        <a:font script="Taml" typeface="Latha"/>
+        <a:font script="Syrc" typeface="Estrangelo Edessa"/>
+        <a:font script="Orya" typeface="Kalinga"/>
+        <a:font script="Mlym" typeface="Kartika"/>
+        <a:font script="Laoo" typeface="DokChampa"/>
+        <a:font script="Sinh" typeface="Iskoola Pota"/>
+        <a:font script="Mong" typeface="Mongolian Baiti"/>
+        <a:font script="Viet" typeface="Times New Roman"/>
+        <a:font script="Uigh" typeface="Microsoft Uighur"/>
+        <a:font script="Geor" typeface="Sylfaen"/>
+      </a:majorFont>
+      <a:minorFont>
+        <a:latin typeface="Calibri" panose="020F0502020204030204"/>
+        <a:ea typeface=""/>
+        <a:cs typeface=""/>
+        <a:font script="Jpan" typeface="游ゴシック"/>
+        <a:font script="Hang" typeface="맑은 고딕"/>
+        <a:font script="Hans" typeface="等线"/>
+        <a:font script="Hant" typeface="新細明體"/>
+        <a:font script="Arab" typeface="Arial"/>
+        <a:font script="Hebr" typeface="Arial"/>
+        <a:font script="Thai" typeface="Cordia New"/>
+        <a:font script="Ethi" typeface="Nyala"/>
+        <a:font script="Beng" typeface="Vrinda"/>
+        <a:font script="Gujr" typeface="Shruti"/>
+        <a:font script="Khmr" typeface="DaunPenh"/>
+        <a:font script="Knda" typeface="Tunga"/>
+        <a:font script="Guru" typeface="Raavi"/>
+        <a:font script="Cans" typeface="Euphemia"/>
+        <a:font script="Cher" typeface="Plantagenet Cherokee"/>
+        <a:font script="Yiii" typeface="Microsoft Yi Baiti"/>
+        <a:font script="Tibt" typeface="Microsoft Himalaya"/>
+        <a:font script="Thaa" typeface="MV Boli"/>
+        <a:font script="Deva" typeface="Mangal"/>
+        <a:font script="Telu" typeface="Gautami"/>
+        <a:font script="Taml" typeface="Latha"/>
+        <a:font script="Syrc" typeface="Estrangelo Edessa"/>
+        <a:font script="Orya" typeface="Kalinga"/>
+        <a:font script="Mlym" typeface="Kartika"/>
+        <a:font script="Laoo" typeface="DokChampa"/>
+        <a:font script="Sinh" typeface="Iskoola Pota"/>
+        <a:font script="Mong" typeface="Mongolian Baiti"/>
+        <a:font script="Viet" typeface="Arial"/>
+        <a:font script="Uigh" typeface="Microsoft Uighur"/>
+        <a:font script="Geor" typeface="Sylfaen"/>
+      </a:minorFont>
+    </a:fontScheme>
+    <a:fmtScheme name="Стандартная">
+      <a:fillStyleLst>
+        <a:solidFill>
+          <a:schemeClr val="phClr"/>
+        </a:solidFill>
+        <a:gradFill rotWithShape="1">
+          <a:gsLst>
+            <a:gs pos="0">
+              <a:schemeClr val="phClr">
+                <a:lumMod val="110000"/>
+                <a:satMod val="105000"/>
+                <a:tint val="67000"/>
+              </a:schemeClr>
+            </a:gs>
+            <a:gs pos="50000">
+              <a:schemeClr val="phClr">
+                <a:lumMod val="105000"/>
+                <a:satMod val="103000"/>
+                <a:tint val="73000"/>
+              </a:schemeClr>
+            </a:gs>
+            <a:gs pos="100000">
+              <a:schemeClr val="phClr">
+                <a:lumMod val="105000"/>
+                <a:satMod val="109000"/>
+                <a:tint val="81000"/>
+              </a:schemeClr>
+            </a:gs>
+          </a:gsLst>
+          <a:lin ang="5400000" scaled="0"/>
+        </a:gradFill>
+        <a:gradFill rotWithShape="1">
+          <a:gsLst>
+            <a:gs pos="0">
+              <a:schemeClr val="phClr">
+                <a:satMod val="103000"/>
+                <a:lumMod val="102000"/>
+                <a:tint val="94000"/>
+              </a:schemeClr>
+            </a:gs>
+            <a:gs pos="50000">
+              <a:schemeClr val="phClr">
+                <a:satMod val="110000"/>
+                <a:lumMod val="100000"/>
+                <a:shade val="100000"/>
+              </a:schemeClr>
+            </a:gs>
+            <a:gs pos="100000">
+              <a:schemeClr val="phClr">
+                <a:lumMod val="99000"/>
+                <a:satMod val="120000"/>
+                <a:shade val="78000"/>
+              </a:schemeClr>
+            </a:gs>
+          </a:gsLst>
+          <a:lin ang="5400000" scaled="0"/>
+        </a:gradFill>
+      </a:fillStyleLst>
+      <a:lnStyleLst>
+        <a:ln w="6350" cap="flat" cmpd="sng" algn="ctr">
+          <a:solidFill>
+            <a:schemeClr val="phClr"/>
+          </a:solidFill>
+          <a:prstDash val="solid"/>
+          <a:miter lim="800000"/>
+        </a:ln>
+        <a:ln w="12700" cap="flat" cmpd="sng" algn="ctr">
+          <a:solidFill>
+            <a:schemeClr val="phClr"/>
+          </a:solidFill>
+          <a:prstDash val="solid"/>
+          <a:miter lim="800000"/>
+        </a:ln>
+        <a:ln w="19050" cap="flat" cmpd="sng" algn="ctr">
+          <a:solidFill>
+            <a:schemeClr val="phClr"/>
+          </a:solidFill>
+          <a:prstDash val="solid"/>
+          <a:miter lim="800000"/>
+        </a:ln>
+      </a:lnStyleLst>
+      <a:effectStyleLst>
+        <a:effectStyle>
+          <a:effectLst/>
+        </a:effectStyle>
+        <a:effectStyle>
+          <a:effectLst/>
+        </a:effectStyle>
+        <a:effectStyle>
+          <a:effectLst>
+            <a:outerShdw blurRad="57150" dist="19050" dir="5400000" algn="ctr" rotWithShape="0">
+              <a:srgbClr val="000000">
+                <a:alpha val="63000"/>
+              </a:srgbClr>
+            </a:outerShdw>
+          </a:effectLst>
+        </a:effectStyle>
+      </a:effectStyleLst>
+      <a:bgFillStyleLst>
+        <a:solidFill>
+          <a:schemeClr val="phClr"/>
+        </a:solidFill>
+        <a:solidFill>
+          <a:schemeClr val="phClr">
+            <a:tint val="95000"/>
+            <a:satMod val="170000"/>
+          </a:schemeClr>
+        </a:solidFill>
+        <a:gradFill rotWithShape="1">
+          <a:gsLst>
+            <a:gs pos="0">
+              <a:schemeClr val="phClr">
+                <a:tint val="93000"/>
+                <a:satMod val="150000"/>
+                <a:shade val="98000"/>
+                <a:lumMod val="102000"/>
+              </a:schemeClr>
+            </a:gs>
+            <a:gs pos="50000">
+              <a:schemeClr val="phClr">
+                <a:tint val="98000"/>
+                <a:satMod val="130000"/>
+                <a:shade val="90000"/>
+                <a:lumMod val="103000"/>
+              </a:schemeClr>
+            </a:gs>
+            <a:gs pos="100000">
+              <a:schemeClr val="phClr">
+                <a:shade val="63000"/>
+                <a:satMod val="120000"/>
+              </a:schemeClr>
+            </a:gs>
+          </a:gsLst>
+          <a:lin ang="5400000" scaled="0"/>
+        </a:gradFill>
+      </a:bgFillStyleLst>
+    </a:fmtScheme>
+  </a:themeElements>
+  <a:objectDefaults/>
+  <a:extraClrSchemeLst/>
+  <a:extLst>
+    <a:ext uri="{05A4C25C-085E-4340-85A3-A5531E510DB2}">
+      <thm15:themeFamily xmlns:thm15="http://schemas.microsoft.com/office/thememl/2012/main" name="Office Theme" id="{62F939B6-93AF-4DB8-9C6B-D6C7DFDC589F}" vid="{4A3C46E8-61CC-4603-A589-7422A47A8E4A}"/>
+    </a:ext>
+  </a:extLst>
+</a:theme>
 </file>